--- a/Documentation/SetupConfigurator.pptx
+++ b/Documentation/SetupConfigurator.pptx
@@ -3522,7 +3522,7 @@
         <p:spPr>
           <a:xfrm>
             <a:off x="685800" y="530912"/>
-            <a:ext cx="7772400" cy="914400"/>
+            <a:ext cx="2387961" cy="523220"/>
           </a:xfrm>
           <a:prstGeom prst="rect">
             <a:avLst/>
@@ -3536,7 +3536,7 @@
           <a:lstStyle/>
           <a:p>
             <a:r>
-              <a:rPr sz="2800" b="1" dirty="0" err="1">
+              <a:rPr sz="2800" b="1" dirty="0" err="1" smtClean="0">
                 <a:solidFill>
                   <a:srgbClr val="F1F5F9"/>
                 </a:solidFill>
@@ -3544,7 +3544,7 @@
               <a:t>Projekt</a:t>
             </a:r>
             <a:r>
-              <a:rPr sz="2800" b="1" dirty="0">
+              <a:rPr lang="hu-HU" sz="2800" b="1" dirty="0" smtClean="0">
                 <a:solidFill>
                   <a:srgbClr val="F1F5F9"/>
                 </a:solidFill>
@@ -3552,7 +3552,7 @@
               <a:t> </a:t>
             </a:r>
             <a:r>
-              <a:rPr sz="2800" b="1" dirty="0" err="1">
+              <a:rPr sz="2800" b="1" dirty="0" err="1" smtClean="0">
                 <a:solidFill>
                   <a:srgbClr val="F1F5F9"/>
                 </a:solidFill>
@@ -3665,6 +3665,14 @@
                 </a:solidFill>
               </a:rPr>
             </a:br>
+            <a:r>
+              <a:rPr lang="hu-HU" dirty="0">
+                <a:solidFill>
+                  <a:schemeClr val="bg1"/>
+                </a:solidFill>
+              </a:rPr>
+              <a:t/>
+            </a:r>
             <a:br>
               <a:rPr lang="hu-HU" dirty="0">
                 <a:solidFill>
@@ -3672,6 +3680,14 @@
                 </a:solidFill>
               </a:rPr>
             </a:br>
+            <a:r>
+              <a:rPr lang="hu-HU" dirty="0">
+                <a:solidFill>
+                  <a:schemeClr val="bg1"/>
+                </a:solidFill>
+              </a:rPr>
+              <a:t/>
+            </a:r>
             <a:br>
               <a:rPr lang="hu-HU" dirty="0">
                 <a:solidFill>
@@ -3679,6 +3695,14 @@
                 </a:solidFill>
               </a:rPr>
             </a:br>
+            <a:r>
+              <a:rPr lang="hu-HU" dirty="0">
+                <a:solidFill>
+                  <a:schemeClr val="bg1"/>
+                </a:solidFill>
+              </a:rPr>
+              <a:t/>
+            </a:r>
             <a:br>
               <a:rPr lang="hu-HU" dirty="0">
                 <a:solidFill>
@@ -3686,6 +3710,14 @@
                 </a:solidFill>
               </a:rPr>
             </a:br>
+            <a:r>
+              <a:rPr lang="hu-HU" dirty="0">
+                <a:solidFill>
+                  <a:schemeClr val="bg1"/>
+                </a:solidFill>
+              </a:rPr>
+              <a:t/>
+            </a:r>
             <a:br>
               <a:rPr lang="hu-HU" dirty="0">
                 <a:solidFill>
@@ -3720,7 +3752,31 @@
                   <a:schemeClr val="bg1"/>
                 </a:solidFill>
               </a:rPr>
-              <a:t>Készítette: Egri Roland, Hazafi Levente,Kovács Norbert</a:t>
+              <a:t>Készítette: Egri Roland, Hazafi </a:t>
+            </a:r>
+            <a:r>
+              <a:rPr lang="hu-HU">
+                <a:solidFill>
+                  <a:schemeClr val="bg1"/>
+                </a:solidFill>
+              </a:rPr>
+              <a:t>Levente</a:t>
+            </a:r>
+            <a:r>
+              <a:rPr lang="hu-HU" smtClean="0">
+                <a:solidFill>
+                  <a:schemeClr val="bg1"/>
+                </a:solidFill>
+              </a:rPr>
+              <a:t>, Kovács </a:t>
+            </a:r>
+            <a:r>
+              <a:rPr lang="hu-HU" dirty="0">
+                <a:solidFill>
+                  <a:schemeClr val="bg1"/>
+                </a:solidFill>
+              </a:rPr>
+              <a:t>Norbert</a:t>
             </a:r>
           </a:p>
           <a:p>
@@ -3770,7 +3826,7 @@
           <p:cNvPr id="8" name="Oval 7">
             <a:extLst>
               <a:ext uri="{FF2B5EF4-FFF2-40B4-BE49-F238E27FC236}">
-                <a16:creationId xmlns:a16="http://schemas.microsoft.com/office/drawing/2014/main" id="{23C0E00B-F372-4320-AA94-F7BE2C3E6591}"/>
+                <a16:creationId xmlns:a16="http://schemas.microsoft.com/office/drawing/2014/main" xmlns="" id="{23C0E00B-F372-4320-AA94-F7BE2C3E6591}"/>
               </a:ext>
             </a:extLst>
           </p:cNvPr>
@@ -3820,7 +3876,7 @@
           <p:cNvPr id="7" name="TextBox 6">
             <a:extLst>
               <a:ext uri="{FF2B5EF4-FFF2-40B4-BE49-F238E27FC236}">
-                <a16:creationId xmlns:a16="http://schemas.microsoft.com/office/drawing/2014/main" id="{EBB31A3A-2CBF-4CD5-93EB-5A6508C773FA}"/>
+                <a16:creationId xmlns:a16="http://schemas.microsoft.com/office/drawing/2014/main" xmlns="" id="{EBB31A3A-2CBF-4CD5-93EB-5A6508C773FA}"/>
               </a:ext>
             </a:extLst>
           </p:cNvPr>
@@ -3861,6 +3917,13 @@
   <p:clrMapOvr>
     <a:masterClrMapping/>
   </p:clrMapOvr>
+  <p:timing>
+    <p:tnLst>
+      <p:par>
+        <p:cTn id="1" dur="indefinite" restart="never" nodeType="tmRoot"/>
+      </p:par>
+    </p:tnLst>
+  </p:timing>
 </p:sld>
 </file>
 
@@ -3894,7 +3957,7 @@
           <p:cNvPr id="2" name="Rectangle 1">
             <a:extLst>
               <a:ext uri="{FF2B5EF4-FFF2-40B4-BE49-F238E27FC236}">
-                <a16:creationId xmlns:a16="http://schemas.microsoft.com/office/drawing/2014/main" id="{96357895-86CB-46C7-9F00-C248D95D3685}"/>
+                <a16:creationId xmlns:a16="http://schemas.microsoft.com/office/drawing/2014/main" xmlns="" id="{96357895-86CB-46C7-9F00-C248D95D3685}"/>
               </a:ext>
             </a:extLst>
           </p:cNvPr>
@@ -3946,7 +4009,7 @@
           <p:cNvPr id="3" name="Rounded Rectangle 3">
             <a:extLst>
               <a:ext uri="{FF2B5EF4-FFF2-40B4-BE49-F238E27FC236}">
-                <a16:creationId xmlns:a16="http://schemas.microsoft.com/office/drawing/2014/main" id="{A4E49908-03E5-4E6D-8641-9B44D48F3702}"/>
+                <a16:creationId xmlns:a16="http://schemas.microsoft.com/office/drawing/2014/main" xmlns="" id="{A4E49908-03E5-4E6D-8641-9B44D48F3702}"/>
               </a:ext>
             </a:extLst>
           </p:cNvPr>
@@ -3998,7 +4061,7 @@
           <p:cNvPr id="4" name="TextBox 3">
             <a:extLst>
               <a:ext uri="{FF2B5EF4-FFF2-40B4-BE49-F238E27FC236}">
-                <a16:creationId xmlns:a16="http://schemas.microsoft.com/office/drawing/2014/main" id="{AF5C3B84-CE68-49AD-9F83-02E2192243A3}"/>
+                <a16:creationId xmlns:a16="http://schemas.microsoft.com/office/drawing/2014/main" xmlns="" id="{AF5C3B84-CE68-49AD-9F83-02E2192243A3}"/>
               </a:ext>
             </a:extLst>
           </p:cNvPr>
@@ -4042,7 +4105,7 @@
           <p:cNvPr id="6" name="TextBox 5">
             <a:extLst>
               <a:ext uri="{FF2B5EF4-FFF2-40B4-BE49-F238E27FC236}">
-                <a16:creationId xmlns:a16="http://schemas.microsoft.com/office/drawing/2014/main" id="{10A956AA-DB74-4183-878B-E5B39EAD512C}"/>
+                <a16:creationId xmlns:a16="http://schemas.microsoft.com/office/drawing/2014/main" xmlns="" id="{10A956AA-DB74-4183-878B-E5B39EAD512C}"/>
               </a:ext>
             </a:extLst>
           </p:cNvPr>
@@ -4250,7 +4313,7 @@
           <p:cNvPr id="7" name="TextBox 6">
             <a:extLst>
               <a:ext uri="{FF2B5EF4-FFF2-40B4-BE49-F238E27FC236}">
-                <a16:creationId xmlns:a16="http://schemas.microsoft.com/office/drawing/2014/main" id="{4502F05F-48A3-43D6-854D-AF22D60C572D}"/>
+                <a16:creationId xmlns:a16="http://schemas.microsoft.com/office/drawing/2014/main" xmlns="" id="{4502F05F-48A3-43D6-854D-AF22D60C572D}"/>
               </a:ext>
             </a:extLst>
           </p:cNvPr>
@@ -4299,6 +4362,13 @@
   <p:transition spd="slow">
     <p:cover/>
   </p:transition>
+  <p:timing>
+    <p:tnLst>
+      <p:par>
+        <p:cTn id="1" dur="indefinite" restart="never" nodeType="tmRoot"/>
+      </p:par>
+    </p:tnLst>
+  </p:timing>
 </p:sld>
 </file>
 
@@ -4332,7 +4402,7 @@
           <p:cNvPr id="2" name="Rectangle 1">
             <a:extLst>
               <a:ext uri="{FF2B5EF4-FFF2-40B4-BE49-F238E27FC236}">
-                <a16:creationId xmlns:a16="http://schemas.microsoft.com/office/drawing/2014/main" id="{BB829B83-ECD1-4E5F-86DF-E12F5F41EF68}"/>
+                <a16:creationId xmlns:a16="http://schemas.microsoft.com/office/drawing/2014/main" xmlns="" id="{BB829B83-ECD1-4E5F-86DF-E12F5F41EF68}"/>
               </a:ext>
             </a:extLst>
           </p:cNvPr>
@@ -4384,7 +4454,7 @@
           <p:cNvPr id="3" name="Rounded Rectangle 3">
             <a:extLst>
               <a:ext uri="{FF2B5EF4-FFF2-40B4-BE49-F238E27FC236}">
-                <a16:creationId xmlns:a16="http://schemas.microsoft.com/office/drawing/2014/main" id="{F80671CF-2C26-4C21-A281-2606061CB215}"/>
+                <a16:creationId xmlns:a16="http://schemas.microsoft.com/office/drawing/2014/main" xmlns="" id="{F80671CF-2C26-4C21-A281-2606061CB215}"/>
               </a:ext>
             </a:extLst>
           </p:cNvPr>
@@ -4436,7 +4506,7 @@
           <p:cNvPr id="4" name="TextBox 3">
             <a:extLst>
               <a:ext uri="{FF2B5EF4-FFF2-40B4-BE49-F238E27FC236}">
-                <a16:creationId xmlns:a16="http://schemas.microsoft.com/office/drawing/2014/main" id="{AC794F39-CF5D-489D-98DC-403C9DFF1B19}"/>
+                <a16:creationId xmlns:a16="http://schemas.microsoft.com/office/drawing/2014/main" xmlns="" id="{AC794F39-CF5D-489D-98DC-403C9DFF1B19}"/>
               </a:ext>
             </a:extLst>
           </p:cNvPr>
@@ -4480,7 +4550,7 @@
           <p:cNvPr id="5" name="TextBox 4">
             <a:extLst>
               <a:ext uri="{FF2B5EF4-FFF2-40B4-BE49-F238E27FC236}">
-                <a16:creationId xmlns:a16="http://schemas.microsoft.com/office/drawing/2014/main" id="{32FE24D2-CBF9-4309-BAAA-AF59BD4C6075}"/>
+                <a16:creationId xmlns:a16="http://schemas.microsoft.com/office/drawing/2014/main" xmlns="" id="{32FE24D2-CBF9-4309-BAAA-AF59BD4C6075}"/>
               </a:ext>
             </a:extLst>
           </p:cNvPr>
@@ -4669,7 +4739,7 @@
           <p:cNvPr id="6" name="TextBox 5">
             <a:extLst>
               <a:ext uri="{FF2B5EF4-FFF2-40B4-BE49-F238E27FC236}">
-                <a16:creationId xmlns:a16="http://schemas.microsoft.com/office/drawing/2014/main" id="{AEB8C6F1-1F19-4DB0-80B6-B791949A9947}"/>
+                <a16:creationId xmlns:a16="http://schemas.microsoft.com/office/drawing/2014/main" xmlns="" id="{AEB8C6F1-1F19-4DB0-80B6-B791949A9947}"/>
               </a:ext>
             </a:extLst>
           </p:cNvPr>
@@ -4718,6 +4788,13 @@
   <p:transition spd="slow">
     <p:cover/>
   </p:transition>
+  <p:timing>
+    <p:tnLst>
+      <p:par>
+        <p:cTn id="1" dur="indefinite" restart="never" nodeType="tmRoot"/>
+      </p:par>
+    </p:tnLst>
+  </p:timing>
 </p:sld>
 </file>
 
@@ -5237,7 +5314,7 @@
           <p:cNvPr id="7" name="TextBox 6">
             <a:extLst>
               <a:ext uri="{FF2B5EF4-FFF2-40B4-BE49-F238E27FC236}">
-                <a16:creationId xmlns:a16="http://schemas.microsoft.com/office/drawing/2014/main" id="{B523B7F3-E4EF-459D-9EED-FF0A1C25F626}"/>
+                <a16:creationId xmlns:a16="http://schemas.microsoft.com/office/drawing/2014/main" xmlns="" id="{B523B7F3-E4EF-459D-9EED-FF0A1C25F626}"/>
               </a:ext>
             </a:extLst>
           </p:cNvPr>
@@ -5281,6 +5358,13 @@
   <p:transition spd="slow">
     <p:cover/>
   </p:transition>
+  <p:timing>
+    <p:tnLst>
+      <p:par>
+        <p:cTn id="1" dur="indefinite" restart="never" nodeType="tmRoot"/>
+      </p:par>
+    </p:tnLst>
+  </p:timing>
 </p:sld>
 </file>
 
@@ -5314,7 +5398,7 @@
           <p:cNvPr id="8" name="Picture 7">
             <a:extLst>
               <a:ext uri="{FF2B5EF4-FFF2-40B4-BE49-F238E27FC236}">
-                <a16:creationId xmlns:a16="http://schemas.microsoft.com/office/drawing/2014/main" id="{AC8FFCC1-933E-4062-A2B7-EC754DA41637}"/>
+                <a16:creationId xmlns:a16="http://schemas.microsoft.com/office/drawing/2014/main" xmlns="" id="{AC8FFCC1-933E-4062-A2B7-EC754DA41637}"/>
               </a:ext>
             </a:extLst>
           </p:cNvPr>
@@ -5780,7 +5864,7 @@
           <p:cNvPr id="1026" name="Picture 2" descr="Entity-Attribute-Value (EAV) Model - DEV Community">
             <a:extLst>
               <a:ext uri="{FF2B5EF4-FFF2-40B4-BE49-F238E27FC236}">
-                <a16:creationId xmlns:a16="http://schemas.microsoft.com/office/drawing/2014/main" id="{590194E7-C6E5-4E68-82E0-4569C2FACD0B}"/>
+                <a16:creationId xmlns:a16="http://schemas.microsoft.com/office/drawing/2014/main" xmlns="" id="{590194E7-C6E5-4E68-82E0-4569C2FACD0B}"/>
               </a:ext>
             </a:extLst>
           </p:cNvPr>
@@ -5827,7 +5911,7 @@
           <p:cNvPr id="9" name="TextBox 8">
             <a:extLst>
               <a:ext uri="{FF2B5EF4-FFF2-40B4-BE49-F238E27FC236}">
-                <a16:creationId xmlns:a16="http://schemas.microsoft.com/office/drawing/2014/main" id="{494006C1-5ED5-40BD-890E-F6A9D47770AE}"/>
+                <a16:creationId xmlns:a16="http://schemas.microsoft.com/office/drawing/2014/main" xmlns="" id="{494006C1-5ED5-40BD-890E-F6A9D47770AE}"/>
               </a:ext>
             </a:extLst>
           </p:cNvPr>
@@ -5871,6 +5955,13 @@
   <p:transition spd="slow">
     <p:cover/>
   </p:transition>
+  <p:timing>
+    <p:tnLst>
+      <p:par>
+        <p:cTn id="1" dur="indefinite" restart="never" nodeType="tmRoot"/>
+      </p:par>
+    </p:tnLst>
+  </p:timing>
 </p:sld>
 </file>
 
@@ -5904,7 +5995,7 @@
           <p:cNvPr id="2" name="Rectangle 1">
             <a:extLst>
               <a:ext uri="{FF2B5EF4-FFF2-40B4-BE49-F238E27FC236}">
-                <a16:creationId xmlns:a16="http://schemas.microsoft.com/office/drawing/2014/main" id="{BB6B8B2D-C201-45F7-B2A1-1F5E138DD921}"/>
+                <a16:creationId xmlns:a16="http://schemas.microsoft.com/office/drawing/2014/main" xmlns="" id="{BB6B8B2D-C201-45F7-B2A1-1F5E138DD921}"/>
               </a:ext>
             </a:extLst>
           </p:cNvPr>
@@ -5956,7 +6047,7 @@
           <p:cNvPr id="3" name="TextBox 2">
             <a:extLst>
               <a:ext uri="{FF2B5EF4-FFF2-40B4-BE49-F238E27FC236}">
-                <a16:creationId xmlns:a16="http://schemas.microsoft.com/office/drawing/2014/main" id="{3625E665-B9C8-42DA-AB15-BCA14136B96F}"/>
+                <a16:creationId xmlns:a16="http://schemas.microsoft.com/office/drawing/2014/main" xmlns="" id="{3625E665-B9C8-42DA-AB15-BCA14136B96F}"/>
               </a:ext>
             </a:extLst>
           </p:cNvPr>
@@ -5995,7 +6086,7 @@
           <p:cNvPr id="4" name="Rounded Rectangle 3">
             <a:extLst>
               <a:ext uri="{FF2B5EF4-FFF2-40B4-BE49-F238E27FC236}">
-                <a16:creationId xmlns:a16="http://schemas.microsoft.com/office/drawing/2014/main" id="{91FC94B2-4330-421F-8B3A-EEB7D5EB5841}"/>
+                <a16:creationId xmlns:a16="http://schemas.microsoft.com/office/drawing/2014/main" xmlns="" id="{91FC94B2-4330-421F-8B3A-EEB7D5EB5841}"/>
               </a:ext>
             </a:extLst>
           </p:cNvPr>
@@ -6047,7 +6138,7 @@
           <p:cNvPr id="6" name="TextBox 5">
             <a:extLst>
               <a:ext uri="{FF2B5EF4-FFF2-40B4-BE49-F238E27FC236}">
-                <a16:creationId xmlns:a16="http://schemas.microsoft.com/office/drawing/2014/main" id="{06D0ABA5-2E88-4C02-877B-451B5EB1B97A}"/>
+                <a16:creationId xmlns:a16="http://schemas.microsoft.com/office/drawing/2014/main" xmlns="" id="{06D0ABA5-2E88-4C02-877B-451B5EB1B97A}"/>
               </a:ext>
             </a:extLst>
           </p:cNvPr>
@@ -6086,7 +6177,7 @@
           <p:cNvPr id="7" name="TextBox 6">
             <a:extLst>
               <a:ext uri="{FF2B5EF4-FFF2-40B4-BE49-F238E27FC236}">
-                <a16:creationId xmlns:a16="http://schemas.microsoft.com/office/drawing/2014/main" id="{93BF9690-88C4-4E9D-A8FE-26793C804FCF}"/>
+                <a16:creationId xmlns:a16="http://schemas.microsoft.com/office/drawing/2014/main" xmlns="" id="{93BF9690-88C4-4E9D-A8FE-26793C804FCF}"/>
               </a:ext>
             </a:extLst>
           </p:cNvPr>
@@ -6125,7 +6216,7 @@
           <p:cNvPr id="8" name="TextBox 7">
             <a:extLst>
               <a:ext uri="{FF2B5EF4-FFF2-40B4-BE49-F238E27FC236}">
-                <a16:creationId xmlns:a16="http://schemas.microsoft.com/office/drawing/2014/main" id="{67CD7E81-FEEF-4A1C-A6C9-C840FDA189C7}"/>
+                <a16:creationId xmlns:a16="http://schemas.microsoft.com/office/drawing/2014/main" xmlns="" id="{67CD7E81-FEEF-4A1C-A6C9-C840FDA189C7}"/>
               </a:ext>
             </a:extLst>
           </p:cNvPr>
@@ -6164,7 +6255,7 @@
           <p:cNvPr id="9" name="TextBox 8">
             <a:extLst>
               <a:ext uri="{FF2B5EF4-FFF2-40B4-BE49-F238E27FC236}">
-                <a16:creationId xmlns:a16="http://schemas.microsoft.com/office/drawing/2014/main" id="{B21F0610-1299-4D90-B1E8-A768215B53CB}"/>
+                <a16:creationId xmlns:a16="http://schemas.microsoft.com/office/drawing/2014/main" xmlns="" id="{B21F0610-1299-4D90-B1E8-A768215B53CB}"/>
               </a:ext>
             </a:extLst>
           </p:cNvPr>
@@ -6203,7 +6294,7 @@
           <p:cNvPr id="10" name="TextBox 9">
             <a:extLst>
               <a:ext uri="{FF2B5EF4-FFF2-40B4-BE49-F238E27FC236}">
-                <a16:creationId xmlns:a16="http://schemas.microsoft.com/office/drawing/2014/main" id="{7D1BC8E3-31AD-4FAD-A5B3-A26F55EEA487}"/>
+                <a16:creationId xmlns:a16="http://schemas.microsoft.com/office/drawing/2014/main" xmlns="" id="{7D1BC8E3-31AD-4FAD-A5B3-A26F55EEA487}"/>
               </a:ext>
             </a:extLst>
           </p:cNvPr>
@@ -6252,6 +6343,13 @@
   <p:transition spd="slow">
     <p:cover/>
   </p:transition>
+  <p:timing>
+    <p:tnLst>
+      <p:par>
+        <p:cTn id="1" dur="indefinite" restart="never" nodeType="tmRoot"/>
+      </p:par>
+    </p:tnLst>
+  </p:timing>
 </p:sld>
 </file>
 
@@ -6542,7 +6640,7 @@
           <p:cNvPr id="7" name="TextBox 6">
             <a:extLst>
               <a:ext uri="{FF2B5EF4-FFF2-40B4-BE49-F238E27FC236}">
-                <a16:creationId xmlns:a16="http://schemas.microsoft.com/office/drawing/2014/main" id="{AF4108F2-7FD0-4E37-8997-A905415FDC55}"/>
+                <a16:creationId xmlns:a16="http://schemas.microsoft.com/office/drawing/2014/main" xmlns="" id="{AF4108F2-7FD0-4E37-8997-A905415FDC55}"/>
               </a:ext>
             </a:extLst>
           </p:cNvPr>
@@ -6586,6 +6684,13 @@
   <p:transition spd="slow">
     <p:cover/>
   </p:transition>
+  <p:timing>
+    <p:tnLst>
+      <p:par>
+        <p:cTn id="1" dur="indefinite" restart="never" nodeType="tmRoot"/>
+      </p:par>
+    </p:tnLst>
+  </p:timing>
 </p:sld>
 </file>
 
@@ -6888,7 +6993,7 @@
           <p:cNvPr id="7" name="TextBox 6">
             <a:extLst>
               <a:ext uri="{FF2B5EF4-FFF2-40B4-BE49-F238E27FC236}">
-                <a16:creationId xmlns:a16="http://schemas.microsoft.com/office/drawing/2014/main" id="{99EC497C-EAE2-4CB3-8377-38159B8B89A4}"/>
+                <a16:creationId xmlns:a16="http://schemas.microsoft.com/office/drawing/2014/main" xmlns="" id="{99EC497C-EAE2-4CB3-8377-38159B8B89A4}"/>
               </a:ext>
             </a:extLst>
           </p:cNvPr>
@@ -6932,6 +7037,13 @@
   <p:transition spd="slow">
     <p:cover/>
   </p:transition>
+  <p:timing>
+    <p:tnLst>
+      <p:par>
+        <p:cTn id="1" dur="indefinite" restart="never" nodeType="tmRoot"/>
+      </p:par>
+    </p:tnLst>
+  </p:timing>
 </p:sld>
 </file>
 
@@ -7147,7 +7259,7 @@
           <p:cNvPr id="7" name="TextBox 6">
             <a:extLst>
               <a:ext uri="{FF2B5EF4-FFF2-40B4-BE49-F238E27FC236}">
-                <a16:creationId xmlns:a16="http://schemas.microsoft.com/office/drawing/2014/main" id="{E17B47FF-2D59-4D70-9DFC-5BE7B62CC9B9}"/>
+                <a16:creationId xmlns:a16="http://schemas.microsoft.com/office/drawing/2014/main" xmlns="" id="{E17B47FF-2D59-4D70-9DFC-5BE7B62CC9B9}"/>
               </a:ext>
             </a:extLst>
           </p:cNvPr>
@@ -7191,6 +7303,13 @@
   <p:transition spd="slow">
     <p:cover/>
   </p:transition>
+  <p:timing>
+    <p:tnLst>
+      <p:par>
+        <p:cTn id="1" dur="indefinite" restart="never" nodeType="tmRoot"/>
+      </p:par>
+    </p:tnLst>
+  </p:timing>
 </p:sld>
 </file>
 
@@ -7392,7 +7511,7 @@
           <p:cNvPr id="7" name="TextBox 5">
             <a:extLst>
               <a:ext uri="{FF2B5EF4-FFF2-40B4-BE49-F238E27FC236}">
-                <a16:creationId xmlns:a16="http://schemas.microsoft.com/office/drawing/2014/main" id="{B92DCF40-F2F0-40CA-88F9-F6739A41D9FA}"/>
+                <a16:creationId xmlns:a16="http://schemas.microsoft.com/office/drawing/2014/main" xmlns="" id="{B92DCF40-F2F0-40CA-88F9-F6739A41D9FA}"/>
               </a:ext>
             </a:extLst>
           </p:cNvPr>
@@ -7462,7 +7581,7 @@
           <p:cNvPr id="8" name="TextBox 4">
             <a:extLst>
               <a:ext uri="{FF2B5EF4-FFF2-40B4-BE49-F238E27FC236}">
-                <a16:creationId xmlns:a16="http://schemas.microsoft.com/office/drawing/2014/main" id="{DE724FF4-DD62-4C88-9839-3898043B8ABB}"/>
+                <a16:creationId xmlns:a16="http://schemas.microsoft.com/office/drawing/2014/main" xmlns="" id="{DE724FF4-DD62-4C88-9839-3898043B8ABB}"/>
               </a:ext>
             </a:extLst>
           </p:cNvPr>
@@ -7525,7 +7644,7 @@
           <p:cNvPr id="9" name="TextBox 3">
             <a:extLst>
               <a:ext uri="{FF2B5EF4-FFF2-40B4-BE49-F238E27FC236}">
-                <a16:creationId xmlns:a16="http://schemas.microsoft.com/office/drawing/2014/main" id="{9086131F-495A-4876-AF94-688A90B09D6C}"/>
+                <a16:creationId xmlns:a16="http://schemas.microsoft.com/office/drawing/2014/main" xmlns="" id="{9086131F-495A-4876-AF94-688A90B09D6C}"/>
               </a:ext>
             </a:extLst>
           </p:cNvPr>
@@ -7588,7 +7707,7 @@
           <p:cNvPr id="10" name="TextBox 2">
             <a:extLst>
               <a:ext uri="{FF2B5EF4-FFF2-40B4-BE49-F238E27FC236}">
-                <a16:creationId xmlns:a16="http://schemas.microsoft.com/office/drawing/2014/main" id="{0ED40CF9-82FB-4D73-8C11-DB7BA6BF800B}"/>
+                <a16:creationId xmlns:a16="http://schemas.microsoft.com/office/drawing/2014/main" xmlns="" id="{0ED40CF9-82FB-4D73-8C11-DB7BA6BF800B}"/>
               </a:ext>
             </a:extLst>
           </p:cNvPr>
@@ -7658,7 +7777,7 @@
           <p:cNvPr id="11" name="TextBox 6">
             <a:extLst>
               <a:ext uri="{FF2B5EF4-FFF2-40B4-BE49-F238E27FC236}">
-                <a16:creationId xmlns:a16="http://schemas.microsoft.com/office/drawing/2014/main" id="{45033DBC-8043-4FC1-B151-8C818FD46C8B}"/>
+                <a16:creationId xmlns:a16="http://schemas.microsoft.com/office/drawing/2014/main" xmlns="" id="{45033DBC-8043-4FC1-B151-8C818FD46C8B}"/>
               </a:ext>
             </a:extLst>
           </p:cNvPr>
@@ -7721,7 +7840,7 @@
           <p:cNvPr id="12" name="TextBox 7">
             <a:extLst>
               <a:ext uri="{FF2B5EF4-FFF2-40B4-BE49-F238E27FC236}">
-                <a16:creationId xmlns:a16="http://schemas.microsoft.com/office/drawing/2014/main" id="{8703D60B-B78F-4C4D-8F4C-A0FD6E006B66}"/>
+                <a16:creationId xmlns:a16="http://schemas.microsoft.com/office/drawing/2014/main" xmlns="" id="{8703D60B-B78F-4C4D-8F4C-A0FD6E006B66}"/>
               </a:ext>
             </a:extLst>
           </p:cNvPr>
@@ -7784,7 +7903,7 @@
           <p:cNvPr id="13" name="TextBox 12">
             <a:extLst>
               <a:ext uri="{FF2B5EF4-FFF2-40B4-BE49-F238E27FC236}">
-                <a16:creationId xmlns:a16="http://schemas.microsoft.com/office/drawing/2014/main" id="{87CA182A-FAEB-4498-8F6C-B0C8CEB62A02}"/>
+                <a16:creationId xmlns:a16="http://schemas.microsoft.com/office/drawing/2014/main" xmlns="" id="{87CA182A-FAEB-4498-8F6C-B0C8CEB62A02}"/>
               </a:ext>
             </a:extLst>
           </p:cNvPr>
@@ -7828,6 +7947,13 @@
   <p:transition spd="med">
     <p:pull/>
   </p:transition>
+  <p:timing>
+    <p:tnLst>
+      <p:par>
+        <p:cTn id="1" dur="indefinite" restart="never" nodeType="tmRoot"/>
+      </p:par>
+    </p:tnLst>
+  </p:timing>
 </p:sld>
 </file>
 
@@ -8269,7 +8395,7 @@
           <p:cNvPr id="7" name="TextBox 6">
             <a:extLst>
               <a:ext uri="{FF2B5EF4-FFF2-40B4-BE49-F238E27FC236}">
-                <a16:creationId xmlns:a16="http://schemas.microsoft.com/office/drawing/2014/main" id="{276C1CDD-E4B9-4774-8B80-CAEED26C26D3}"/>
+                <a16:creationId xmlns:a16="http://schemas.microsoft.com/office/drawing/2014/main" xmlns="" id="{276C1CDD-E4B9-4774-8B80-CAEED26C26D3}"/>
               </a:ext>
             </a:extLst>
           </p:cNvPr>
@@ -8313,6 +8439,13 @@
   <p:transition spd="slow">
     <p:cover/>
   </p:transition>
+  <p:timing>
+    <p:tnLst>
+      <p:par>
+        <p:cTn id="1" dur="indefinite" restart="never" nodeType="tmRoot"/>
+      </p:par>
+    </p:tnLst>
+  </p:timing>
 </p:sld>
 </file>
 
@@ -8679,7 +8812,7 @@
           <p:cNvPr id="9" name="Rectangle: Rounded Corners 8">
             <a:extLst>
               <a:ext uri="{FF2B5EF4-FFF2-40B4-BE49-F238E27FC236}">
-                <a16:creationId xmlns:a16="http://schemas.microsoft.com/office/drawing/2014/main" id="{51B79793-A10B-4B71-9593-C788FBE70D84}"/>
+                <a16:creationId xmlns:a16="http://schemas.microsoft.com/office/drawing/2014/main" xmlns="" id="{51B79793-A10B-4B71-9593-C788FBE70D84}"/>
               </a:ext>
             </a:extLst>
           </p:cNvPr>
@@ -8731,7 +8864,7 @@
           <p:cNvPr id="8" name="TextBox 7">
             <a:extLst>
               <a:ext uri="{FF2B5EF4-FFF2-40B4-BE49-F238E27FC236}">
-                <a16:creationId xmlns:a16="http://schemas.microsoft.com/office/drawing/2014/main" id="{25FDCE3E-11B3-4117-8D37-DD14190E01D5}"/>
+                <a16:creationId xmlns:a16="http://schemas.microsoft.com/office/drawing/2014/main" xmlns="" id="{25FDCE3E-11B3-4117-8D37-DD14190E01D5}"/>
               </a:ext>
             </a:extLst>
           </p:cNvPr>
@@ -8775,6 +8908,13 @@
   <p:transition spd="slow">
     <p:cover/>
   </p:transition>
+  <p:timing>
+    <p:tnLst>
+      <p:par>
+        <p:cTn id="1" dur="indefinite" restart="never" nodeType="tmRoot"/>
+      </p:par>
+    </p:tnLst>
+  </p:timing>
 </p:sld>
 </file>
 
@@ -9172,7 +9312,7 @@
           <p:cNvPr id="7" name="Rectangle: Rounded Corners 6">
             <a:extLst>
               <a:ext uri="{FF2B5EF4-FFF2-40B4-BE49-F238E27FC236}">
-                <a16:creationId xmlns:a16="http://schemas.microsoft.com/office/drawing/2014/main" id="{0F18FD05-6AA2-439D-8A52-CA1DA3EF5541}"/>
+                <a16:creationId xmlns:a16="http://schemas.microsoft.com/office/drawing/2014/main" xmlns="" id="{0F18FD05-6AA2-439D-8A52-CA1DA3EF5541}"/>
               </a:ext>
             </a:extLst>
           </p:cNvPr>
@@ -9216,7 +9356,7 @@
           <p:cNvPr id="11" name="Rectangle: Rounded Corners 10">
             <a:extLst>
               <a:ext uri="{FF2B5EF4-FFF2-40B4-BE49-F238E27FC236}">
-                <a16:creationId xmlns:a16="http://schemas.microsoft.com/office/drawing/2014/main" id="{753D2494-38F3-4610-A07C-D0FDCEF37C5E}"/>
+                <a16:creationId xmlns:a16="http://schemas.microsoft.com/office/drawing/2014/main" xmlns="" id="{753D2494-38F3-4610-A07C-D0FDCEF37C5E}"/>
               </a:ext>
             </a:extLst>
           </p:cNvPr>
@@ -9260,7 +9400,7 @@
           <p:cNvPr id="12" name="Rectangle: Rounded Corners 11">
             <a:extLst>
               <a:ext uri="{FF2B5EF4-FFF2-40B4-BE49-F238E27FC236}">
-                <a16:creationId xmlns:a16="http://schemas.microsoft.com/office/drawing/2014/main" id="{0DBA0DFE-15B5-4B94-AD80-77EA61A2015E}"/>
+                <a16:creationId xmlns:a16="http://schemas.microsoft.com/office/drawing/2014/main" xmlns="" id="{0DBA0DFE-15B5-4B94-AD80-77EA61A2015E}"/>
               </a:ext>
             </a:extLst>
           </p:cNvPr>
@@ -9304,7 +9444,7 @@
           <p:cNvPr id="14" name="Connector: Elbow 13">
             <a:extLst>
               <a:ext uri="{FF2B5EF4-FFF2-40B4-BE49-F238E27FC236}">
-                <a16:creationId xmlns:a16="http://schemas.microsoft.com/office/drawing/2014/main" id="{BE2B7F57-F5DD-4BA4-B08B-9988D0077E2A}"/>
+                <a16:creationId xmlns:a16="http://schemas.microsoft.com/office/drawing/2014/main" xmlns="" id="{BE2B7F57-F5DD-4BA4-B08B-9988D0077E2A}"/>
               </a:ext>
             </a:extLst>
           </p:cNvPr>
@@ -9346,7 +9486,7 @@
           <p:cNvPr id="17" name="Connector: Elbow 16">
             <a:extLst>
               <a:ext uri="{FF2B5EF4-FFF2-40B4-BE49-F238E27FC236}">
-                <a16:creationId xmlns:a16="http://schemas.microsoft.com/office/drawing/2014/main" id="{7B99EC6A-505F-402D-9EBB-B98374166172}"/>
+                <a16:creationId xmlns:a16="http://schemas.microsoft.com/office/drawing/2014/main" xmlns="" id="{7B99EC6A-505F-402D-9EBB-B98374166172}"/>
               </a:ext>
             </a:extLst>
           </p:cNvPr>
@@ -9388,7 +9528,7 @@
           <p:cNvPr id="21" name="TextBox 20">
             <a:extLst>
               <a:ext uri="{FF2B5EF4-FFF2-40B4-BE49-F238E27FC236}">
-                <a16:creationId xmlns:a16="http://schemas.microsoft.com/office/drawing/2014/main" id="{DE07C605-D4B6-4416-815F-CEB97898E028}"/>
+                <a16:creationId xmlns:a16="http://schemas.microsoft.com/office/drawing/2014/main" xmlns="" id="{DE07C605-D4B6-4416-815F-CEB97898E028}"/>
               </a:ext>
             </a:extLst>
           </p:cNvPr>
@@ -9427,7 +9567,7 @@
           <p:cNvPr id="22" name="TextBox 21">
             <a:extLst>
               <a:ext uri="{FF2B5EF4-FFF2-40B4-BE49-F238E27FC236}">
-                <a16:creationId xmlns:a16="http://schemas.microsoft.com/office/drawing/2014/main" id="{945DFF61-783D-4920-96B5-22D5F237B759}"/>
+                <a16:creationId xmlns:a16="http://schemas.microsoft.com/office/drawing/2014/main" xmlns="" id="{945DFF61-783D-4920-96B5-22D5F237B759}"/>
               </a:ext>
             </a:extLst>
           </p:cNvPr>
@@ -9466,7 +9606,7 @@
           <p:cNvPr id="23" name="TextBox 22">
             <a:extLst>
               <a:ext uri="{FF2B5EF4-FFF2-40B4-BE49-F238E27FC236}">
-                <a16:creationId xmlns:a16="http://schemas.microsoft.com/office/drawing/2014/main" id="{C0963809-C9A8-4130-AFAF-B8E01FAA274E}"/>
+                <a16:creationId xmlns:a16="http://schemas.microsoft.com/office/drawing/2014/main" xmlns="" id="{C0963809-C9A8-4130-AFAF-B8E01FAA274E}"/>
               </a:ext>
             </a:extLst>
           </p:cNvPr>
@@ -9505,7 +9645,7 @@
           <p:cNvPr id="15" name="TextBox 14">
             <a:extLst>
               <a:ext uri="{FF2B5EF4-FFF2-40B4-BE49-F238E27FC236}">
-                <a16:creationId xmlns:a16="http://schemas.microsoft.com/office/drawing/2014/main" id="{22E03BA5-9188-44A8-89BA-5B65A787415C}"/>
+                <a16:creationId xmlns:a16="http://schemas.microsoft.com/office/drawing/2014/main" xmlns="" id="{22E03BA5-9188-44A8-89BA-5B65A787415C}"/>
               </a:ext>
             </a:extLst>
           </p:cNvPr>
@@ -9549,6 +9689,13 @@
   <p:transition spd="slow">
     <p:cover/>
   </p:transition>
+  <p:timing>
+    <p:tnLst>
+      <p:par>
+        <p:cTn id="1" dur="indefinite" restart="never" nodeType="tmRoot"/>
+      </p:par>
+    </p:tnLst>
+  </p:timing>
 </p:sld>
 </file>
 
@@ -9582,7 +9729,7 @@
           <p:cNvPr id="9" name="Picture 8">
             <a:extLst>
               <a:ext uri="{FF2B5EF4-FFF2-40B4-BE49-F238E27FC236}">
-                <a16:creationId xmlns:a16="http://schemas.microsoft.com/office/drawing/2014/main" id="{81020CEE-290D-4DC1-837E-57C129B1EC68}"/>
+                <a16:creationId xmlns:a16="http://schemas.microsoft.com/office/drawing/2014/main" xmlns="" id="{81020CEE-290D-4DC1-837E-57C129B1EC68}"/>
               </a:ext>
             </a:extLst>
           </p:cNvPr>
@@ -9612,7 +9759,7 @@
           <p:cNvPr id="7" name="Kép 7">
             <a:extLst>
               <a:ext uri="{FF2B5EF4-FFF2-40B4-BE49-F238E27FC236}">
-                <a16:creationId xmlns:a16="http://schemas.microsoft.com/office/drawing/2014/main" id="{4497FDE6-93CE-4B0B-951B-070FCB30C264}"/>
+                <a16:creationId xmlns:a16="http://schemas.microsoft.com/office/drawing/2014/main" xmlns="" id="{4497FDE6-93CE-4B0B-951B-070FCB30C264}"/>
               </a:ext>
             </a:extLst>
           </p:cNvPr>
@@ -10065,7 +10212,7 @@
           <p:cNvPr id="10" name="TextBox 9">
             <a:extLst>
               <a:ext uri="{FF2B5EF4-FFF2-40B4-BE49-F238E27FC236}">
-                <a16:creationId xmlns:a16="http://schemas.microsoft.com/office/drawing/2014/main" id="{124C2511-A26F-42DC-A18C-645C87DCDF69}"/>
+                <a16:creationId xmlns:a16="http://schemas.microsoft.com/office/drawing/2014/main" xmlns="" id="{124C2511-A26F-42DC-A18C-645C87DCDF69}"/>
               </a:ext>
             </a:extLst>
           </p:cNvPr>
@@ -10109,6 +10256,13 @@
   <p:transition spd="slow">
     <p:cover/>
   </p:transition>
+  <p:timing>
+    <p:tnLst>
+      <p:par>
+        <p:cTn id="1" dur="indefinite" restart="never" nodeType="tmRoot"/>
+      </p:par>
+    </p:tnLst>
+  </p:timing>
 </p:sld>
 </file>
 
@@ -10616,7 +10770,7 @@
           <p:cNvPr id="9" name="Rectangle: Rounded Corners 8">
             <a:extLst>
               <a:ext uri="{FF2B5EF4-FFF2-40B4-BE49-F238E27FC236}">
-                <a16:creationId xmlns:a16="http://schemas.microsoft.com/office/drawing/2014/main" id="{1A292FB1-A66B-414E-8EF6-0F1694007577}"/>
+                <a16:creationId xmlns:a16="http://schemas.microsoft.com/office/drawing/2014/main" xmlns="" id="{1A292FB1-A66B-414E-8EF6-0F1694007577}"/>
               </a:ext>
             </a:extLst>
           </p:cNvPr>
@@ -10668,7 +10822,7 @@
           <p:cNvPr id="10" name="Rectangle: Rounded Corners 9">
             <a:extLst>
               <a:ext uri="{FF2B5EF4-FFF2-40B4-BE49-F238E27FC236}">
-                <a16:creationId xmlns:a16="http://schemas.microsoft.com/office/drawing/2014/main" id="{330587DE-47D6-4B2F-B4B0-77D98E9890C1}"/>
+                <a16:creationId xmlns:a16="http://schemas.microsoft.com/office/drawing/2014/main" xmlns="" id="{330587DE-47D6-4B2F-B4B0-77D98E9890C1}"/>
               </a:ext>
             </a:extLst>
           </p:cNvPr>
@@ -10720,7 +10874,7 @@
           <p:cNvPr id="11" name="Rectangle: Rounded Corners 10">
             <a:extLst>
               <a:ext uri="{FF2B5EF4-FFF2-40B4-BE49-F238E27FC236}">
-                <a16:creationId xmlns:a16="http://schemas.microsoft.com/office/drawing/2014/main" id="{3CBE6345-5941-44EC-9445-D7E8553312EC}"/>
+                <a16:creationId xmlns:a16="http://schemas.microsoft.com/office/drawing/2014/main" xmlns="" id="{3CBE6345-5941-44EC-9445-D7E8553312EC}"/>
               </a:ext>
             </a:extLst>
           </p:cNvPr>
@@ -10772,7 +10926,7 @@
           <p:cNvPr id="12" name="TextBox 11">
             <a:extLst>
               <a:ext uri="{FF2B5EF4-FFF2-40B4-BE49-F238E27FC236}">
-                <a16:creationId xmlns:a16="http://schemas.microsoft.com/office/drawing/2014/main" id="{FE5F750A-9035-4F6B-A164-AE04C9D2215C}"/>
+                <a16:creationId xmlns:a16="http://schemas.microsoft.com/office/drawing/2014/main" xmlns="" id="{FE5F750A-9035-4F6B-A164-AE04C9D2215C}"/>
               </a:ext>
             </a:extLst>
           </p:cNvPr>
@@ -10816,6 +10970,13 @@
   <p:transition spd="slow">
     <p:cover/>
   </p:transition>
+  <p:timing>
+    <p:tnLst>
+      <p:par>
+        <p:cTn id="1" dur="indefinite" restart="never" nodeType="tmRoot"/>
+      </p:par>
+    </p:tnLst>
+  </p:timing>
 </p:sld>
 </file>
 
@@ -10849,7 +11010,7 @@
           <p:cNvPr id="14" name="Rectangle: Rounded Corners 13">
             <a:extLst>
               <a:ext uri="{FF2B5EF4-FFF2-40B4-BE49-F238E27FC236}">
-                <a16:creationId xmlns:a16="http://schemas.microsoft.com/office/drawing/2014/main" id="{5B369AFE-B7C6-4F68-8F3C-4979DF68EAE7}"/>
+                <a16:creationId xmlns:a16="http://schemas.microsoft.com/office/drawing/2014/main" xmlns="" id="{5B369AFE-B7C6-4F68-8F3C-4979DF68EAE7}"/>
               </a:ext>
             </a:extLst>
           </p:cNvPr>
@@ -10896,7 +11057,7 @@
           <p:cNvPr id="6" name="Picture 5">
             <a:extLst>
               <a:ext uri="{FF2B5EF4-FFF2-40B4-BE49-F238E27FC236}">
-                <a16:creationId xmlns:a16="http://schemas.microsoft.com/office/drawing/2014/main" id="{64CBB7AD-E44E-4A4E-ACF0-6BDE562553AB}"/>
+                <a16:creationId xmlns:a16="http://schemas.microsoft.com/office/drawing/2014/main" xmlns="" id="{64CBB7AD-E44E-4A4E-ACF0-6BDE562553AB}"/>
               </a:ext>
             </a:extLst>
           </p:cNvPr>
@@ -10926,7 +11087,7 @@
           <p:cNvPr id="2" name="Rectangle 1">
             <a:extLst>
               <a:ext uri="{FF2B5EF4-FFF2-40B4-BE49-F238E27FC236}">
-                <a16:creationId xmlns:a16="http://schemas.microsoft.com/office/drawing/2014/main" id="{06EAD9E0-7640-4449-B0FE-0BB9EFDE9ADA}"/>
+                <a16:creationId xmlns:a16="http://schemas.microsoft.com/office/drawing/2014/main" xmlns="" id="{06EAD9E0-7640-4449-B0FE-0BB9EFDE9ADA}"/>
               </a:ext>
             </a:extLst>
           </p:cNvPr>
@@ -10978,7 +11139,7 @@
           <p:cNvPr id="4" name="Picture 3">
             <a:extLst>
               <a:ext uri="{FF2B5EF4-FFF2-40B4-BE49-F238E27FC236}">
-                <a16:creationId xmlns:a16="http://schemas.microsoft.com/office/drawing/2014/main" id="{F32DB433-3365-4031-84AF-0B934ABEE54E}"/>
+                <a16:creationId xmlns:a16="http://schemas.microsoft.com/office/drawing/2014/main" xmlns="" id="{F32DB433-3365-4031-84AF-0B934ABEE54E}"/>
               </a:ext>
             </a:extLst>
           </p:cNvPr>
@@ -11008,7 +11169,7 @@
           <p:cNvPr id="10" name="Picture 9">
             <a:extLst>
               <a:ext uri="{FF2B5EF4-FFF2-40B4-BE49-F238E27FC236}">
-                <a16:creationId xmlns:a16="http://schemas.microsoft.com/office/drawing/2014/main" id="{77B5EC1E-BA75-4777-AD1D-15AA1C51A230}"/>
+                <a16:creationId xmlns:a16="http://schemas.microsoft.com/office/drawing/2014/main" xmlns="" id="{77B5EC1E-BA75-4777-AD1D-15AA1C51A230}"/>
               </a:ext>
             </a:extLst>
           </p:cNvPr>
@@ -11038,7 +11199,7 @@
           <p:cNvPr id="12" name="Picture 11">
             <a:extLst>
               <a:ext uri="{FF2B5EF4-FFF2-40B4-BE49-F238E27FC236}">
-                <a16:creationId xmlns:a16="http://schemas.microsoft.com/office/drawing/2014/main" id="{88343213-75BB-4573-B610-E570ADADB912}"/>
+                <a16:creationId xmlns:a16="http://schemas.microsoft.com/office/drawing/2014/main" xmlns="" id="{88343213-75BB-4573-B610-E570ADADB912}"/>
               </a:ext>
             </a:extLst>
           </p:cNvPr>
@@ -11068,7 +11229,7 @@
           <p:cNvPr id="13" name="TextBox 12">
             <a:extLst>
               <a:ext uri="{FF2B5EF4-FFF2-40B4-BE49-F238E27FC236}">
-                <a16:creationId xmlns:a16="http://schemas.microsoft.com/office/drawing/2014/main" id="{19A256D7-41C4-4522-B746-131370863DED}"/>
+                <a16:creationId xmlns:a16="http://schemas.microsoft.com/office/drawing/2014/main" xmlns="" id="{19A256D7-41C4-4522-B746-131370863DED}"/>
               </a:ext>
             </a:extLst>
           </p:cNvPr>
@@ -11107,7 +11268,7 @@
           <p:cNvPr id="9" name="TextBox 8">
             <a:extLst>
               <a:ext uri="{FF2B5EF4-FFF2-40B4-BE49-F238E27FC236}">
-                <a16:creationId xmlns:a16="http://schemas.microsoft.com/office/drawing/2014/main" id="{623D1902-9E83-4329-AD95-423A7EA117A1}"/>
+                <a16:creationId xmlns:a16="http://schemas.microsoft.com/office/drawing/2014/main" xmlns="" id="{623D1902-9E83-4329-AD95-423A7EA117A1}"/>
               </a:ext>
             </a:extLst>
           </p:cNvPr>
@@ -11156,6 +11317,13 @@
   <p:transition spd="slow">
     <p:cover/>
   </p:transition>
+  <p:timing>
+    <p:tnLst>
+      <p:par>
+        <p:cTn id="1" dur="indefinite" restart="never" nodeType="tmRoot"/>
+      </p:par>
+    </p:tnLst>
+  </p:timing>
 </p:sld>
 </file>
 
@@ -11439,7 +11607,7 @@
           <p:cNvPr id="7" name="TextBox 6">
             <a:extLst>
               <a:ext uri="{FF2B5EF4-FFF2-40B4-BE49-F238E27FC236}">
-                <a16:creationId xmlns:a16="http://schemas.microsoft.com/office/drawing/2014/main" id="{184E4694-55AA-4F9A-8DF7-3EF52278F528}"/>
+                <a16:creationId xmlns:a16="http://schemas.microsoft.com/office/drawing/2014/main" xmlns="" id="{184E4694-55AA-4F9A-8DF7-3EF52278F528}"/>
               </a:ext>
             </a:extLst>
           </p:cNvPr>
@@ -11483,6 +11651,13 @@
   <p:transition spd="slow">
     <p:cover/>
   </p:transition>
+  <p:timing>
+    <p:tnLst>
+      <p:par>
+        <p:cTn id="1" dur="indefinite" restart="never" nodeType="tmRoot"/>
+      </p:par>
+    </p:tnLst>
+  </p:timing>
 </p:sld>
 </file>
 
